--- a/word-drafts/figures/xRegistry-Fig1-RegistryShape.pptx
+++ b/word-drafts/figures/xRegistry-Fig1-RegistryShape.pptx
@@ -3506,7 +3506,7 @@
         <p:spPr>
           <a:xfrm>
             <a:off x="3309937" y="1228725"/>
-            <a:ext cx="428625" cy="123825"/>
+            <a:ext cx="533400" cy="123825"/>
           </a:xfrm>
           <a:prstGeom prst="rect">
             <a:avLst/>
@@ -3577,7 +3577,7 @@
         <p:spPr>
           <a:xfrm>
             <a:off x="4595812" y="1228725"/>
-            <a:ext cx="428625" cy="123825"/>
+            <a:ext cx="533400" cy="123825"/>
           </a:xfrm>
           <a:prstGeom prst="rect">
             <a:avLst/>
@@ -3648,7 +3648,7 @@
         <p:spPr>
           <a:xfrm>
             <a:off x="2024062" y="2314575"/>
-            <a:ext cx="428625" cy="123825"/>
+            <a:ext cx="533400" cy="123825"/>
           </a:xfrm>
           <a:prstGeom prst="rect">
             <a:avLst/>
@@ -3719,7 +3719,7 @@
         <p:spPr>
           <a:xfrm>
             <a:off x="3309937" y="2314575"/>
-            <a:ext cx="428625" cy="123825"/>
+            <a:ext cx="533400" cy="123825"/>
           </a:xfrm>
           <a:prstGeom prst="rect">
             <a:avLst/>
@@ -3790,7 +3790,7 @@
         <p:spPr>
           <a:xfrm>
             <a:off x="5881687" y="2314575"/>
-            <a:ext cx="428625" cy="123825"/>
+            <a:ext cx="533400" cy="123825"/>
           </a:xfrm>
           <a:prstGeom prst="rect">
             <a:avLst/>
@@ -3862,7 +3862,7 @@
         <p:spPr>
           <a:xfrm>
             <a:off x="2667000" y="3400425"/>
-            <a:ext cx="676275" cy="123825"/>
+            <a:ext cx="847725" cy="123825"/>
           </a:xfrm>
           <a:prstGeom prst="rect">
             <a:avLst/>
